--- a/заняття_16/презентація/PCA_Unsupervised_Learning.pptx
+++ b/заняття_16/презентація/PCA_Unsupervised_Learning.pptx
@@ -124,7 +124,7 @@
 <file path=ppt/charts/chart1.xml><?xml version="1.0" encoding="utf-8"?>
 <c:chartSpace xmlns:c="http://schemas.openxmlformats.org/drawingml/2006/chart" xmlns:a="http://schemas.openxmlformats.org/drawingml/2006/main" xmlns:r="http://schemas.openxmlformats.org/officeDocument/2006/relationships" xmlns:c16r2="http://schemas.microsoft.com/office/drawing/2015/06/chart">
   <c:date1904 val="0"/>
-  <c:lang val="en-US"/>
+  <c:lang val="uk-UA"/>
   <c:roundedCorners val="1"/>
   <c:style val="2"/>
   <c:chart>
@@ -357,7 +357,7 @@
                 <a:latin typeface="Arial"/>
               </a:defRPr>
             </a:pPr>
-            <a:endParaRPr lang="en-US"/>
+            <a:endParaRPr lang="ru-RU"/>
           </a:p>
         </c:txPr>
         <c:crossAx val="2094734552"/>
@@ -407,7 +407,7 @@
                 <a:latin typeface="Arial"/>
               </a:defRPr>
             </a:pPr>
-            <a:endParaRPr lang="en-US"/>
+            <a:endParaRPr lang="ru-RU"/>
           </a:p>
         </c:txPr>
         <c:crossAx val="2094734554"/>
@@ -446,7 +446,7 @@
 <file path=ppt/charts/chart2.xml><?xml version="1.0" encoding="utf-8"?>
 <c:chartSpace xmlns:c="http://schemas.openxmlformats.org/drawingml/2006/chart" xmlns:a="http://schemas.openxmlformats.org/drawingml/2006/main" xmlns:r="http://schemas.openxmlformats.org/officeDocument/2006/relationships" xmlns:c16r2="http://schemas.microsoft.com/office/drawing/2015/06/chart">
   <c:date1904 val="0"/>
-  <c:lang val="en-US"/>
+  <c:lang val="uk-UA"/>
   <c:roundedCorners val="1"/>
   <c:style val="2"/>
   <c:chart>
@@ -723,7 +723,7 @@
                 <a:latin typeface="Arial"/>
               </a:defRPr>
             </a:pPr>
-            <a:endParaRPr lang="en-US"/>
+            <a:endParaRPr lang="ru-RU"/>
           </a:p>
         </c:txPr>
         <c:crossAx val="2094734552"/>
@@ -776,7 +776,7 @@
                 <a:latin typeface="Arial"/>
               </a:defRPr>
             </a:pPr>
-            <a:endParaRPr lang="en-US"/>
+            <a:endParaRPr lang="ru-RU"/>
           </a:p>
         </c:txPr>
         <c:crossAx val="2094734554"/>
@@ -807,7 +807,7 @@
               </a:solidFill>
             </a:defRPr>
           </a:pPr>
-          <a:endParaRPr lang="en-US"/>
+          <a:endParaRPr lang="ru-RU"/>
         </a:p>
       </c:txPr>
     </c:legend>
@@ -833,7 +833,7 @@
 <file path=ppt/charts/chart3.xml><?xml version="1.0" encoding="utf-8"?>
 <c:chartSpace xmlns:c="http://schemas.openxmlformats.org/drawingml/2006/chart" xmlns:a="http://schemas.openxmlformats.org/drawingml/2006/main" xmlns:r="http://schemas.openxmlformats.org/officeDocument/2006/relationships" xmlns:c16r2="http://schemas.microsoft.com/office/drawing/2015/06/chart">
   <c:date1904 val="0"/>
-  <c:lang val="en-US"/>
+  <c:lang val="uk-UA"/>
   <c:roundedCorners val="1"/>
   <c:style val="2"/>
   <c:chart>
@@ -1579,7 +1579,7 @@
                 <a:latin typeface="Arial"/>
               </a:defRPr>
             </a:pPr>
-            <a:endParaRPr lang="en-US"/>
+            <a:endParaRPr lang="ru-RU"/>
           </a:p>
         </c:txPr>
         <c:crossAx val="2094734552"/>
@@ -1657,7 +1657,7 @@
                 <a:latin typeface="Arial"/>
               </a:defRPr>
             </a:pPr>
-            <a:endParaRPr lang="en-US"/>
+            <a:endParaRPr lang="ru-RU"/>
           </a:p>
         </c:txPr>
         <c:crossAx val="2094734554"/>
@@ -1688,7 +1688,7 @@
               </a:solidFill>
             </a:defRPr>
           </a:pPr>
-          <a:endParaRPr lang="en-US"/>
+          <a:endParaRPr lang="ru-RU"/>
         </a:p>
       </c:txPr>
     </c:legend>
@@ -4968,29 +4968,7 @@
                 <a:ea typeface="Calibri" pitchFamily="34" charset="-122"/>
                 <a:cs typeface="Calibri" pitchFamily="34" charset="-120"/>
               </a:rPr>
-              <a:t>Якщо зріст і вага людини сильно корелюють — навіщо тримати обидві ознаки як незалежні </a:t>
-            </a:r>
-            <a:r>
-              <a:rPr lang="en-US" sz="1350" i="1" dirty="0" err="1">
-                <a:solidFill>
-                  <a:srgbClr val="E9EEFC"/>
-                </a:solidFill>
-                <a:latin typeface="Calibri" pitchFamily="34" charset="0"/>
-                <a:ea typeface="Calibri" pitchFamily="34" charset="-122"/>
-                <a:cs typeface="Calibri" pitchFamily="34" charset="-120"/>
-              </a:rPr>
-              <a:t>виміри</a:t>
-            </a:r>
-            <a:r>
-              <a:rPr lang="en-US" sz="1350" i="1" dirty="0">
-                <a:solidFill>
-                  <a:srgbClr val="E9EEFC"/>
-                </a:solidFill>
-                <a:latin typeface="Calibri" pitchFamily="34" charset="0"/>
-                <a:ea typeface="Calibri" pitchFamily="34" charset="-122"/>
-                <a:cs typeface="Calibri" pitchFamily="34" charset="-120"/>
-              </a:rPr>
-              <a:t>?</a:t>
+              <a:t>Якщо зріст і вага людини сильно корелюють — навіщо тримати обидві ознаки як незалежні виміри?</a:t>
             </a:r>
             <a:endParaRPr lang="en-US" sz="1350" dirty="0"/>
           </a:p>
@@ -9448,7 +9426,7 @@
                 <a:ea typeface="Cambria" pitchFamily="34" charset="-122"/>
                 <a:cs typeface="Cambria" pitchFamily="34" charset="-120"/>
               </a:rPr>
-              <a:t>PCA ‘бачить’ приховані групи</a:t>
+              <a:t>PCA “бачить” приховані групи</a:t>
             </a:r>
             <a:endParaRPr lang="en-US" sz="3200" dirty="0"/>
           </a:p>
